--- a/legacy-itf-prp_038_24li-assets/images/figure.pptx
+++ b/legacy-itf-prp_038_24li-assets/images/figure.pptx
@@ -104,6 +104,11 @@
       </a:defRPr>
     </a:lvl9pPr>
   </p:defaultTextStyle>
+  <p:extLst>
+    <p:ext uri="{EFAFB233-063F-42B5-8137-9DF3F51BA10A}">
+      <p15:sldGuideLst xmlns:p15="http://schemas.microsoft.com/office/powerpoint/2012/main"/>
+    </p:ext>
+  </p:extLst>
 </p:presentation>
 </file>
 
@@ -256,7 +261,7 @@
           <a:p>
             <a:fld id="{F7F0ACB4-F5F3-4B8C-AE22-60D0A60175C5}" type="datetimeFigureOut">
               <a:rPr lang="LID4096" smtClean="0"/>
-              <a:t>03/25/2025</a:t>
+              <a:t>04/08/2026</a:t>
             </a:fld>
             <a:endParaRPr lang="LID4096"/>
           </a:p>
@@ -456,7 +461,7 @@
           <a:p>
             <a:fld id="{F7F0ACB4-F5F3-4B8C-AE22-60D0A60175C5}" type="datetimeFigureOut">
               <a:rPr lang="LID4096" smtClean="0"/>
-              <a:t>03/25/2025</a:t>
+              <a:t>04/08/2026</a:t>
             </a:fld>
             <a:endParaRPr lang="LID4096"/>
           </a:p>
@@ -666,7 +671,7 @@
           <a:p>
             <a:fld id="{F7F0ACB4-F5F3-4B8C-AE22-60D0A60175C5}" type="datetimeFigureOut">
               <a:rPr lang="LID4096" smtClean="0"/>
-              <a:t>03/25/2025</a:t>
+              <a:t>04/08/2026</a:t>
             </a:fld>
             <a:endParaRPr lang="LID4096"/>
           </a:p>
@@ -866,7 +871,7 @@
           <a:p>
             <a:fld id="{F7F0ACB4-F5F3-4B8C-AE22-60D0A60175C5}" type="datetimeFigureOut">
               <a:rPr lang="LID4096" smtClean="0"/>
-              <a:t>03/25/2025</a:t>
+              <a:t>04/08/2026</a:t>
             </a:fld>
             <a:endParaRPr lang="LID4096"/>
           </a:p>
@@ -1142,7 +1147,7 @@
           <a:p>
             <a:fld id="{F7F0ACB4-F5F3-4B8C-AE22-60D0A60175C5}" type="datetimeFigureOut">
               <a:rPr lang="LID4096" smtClean="0"/>
-              <a:t>03/25/2025</a:t>
+              <a:t>04/08/2026</a:t>
             </a:fld>
             <a:endParaRPr lang="LID4096"/>
           </a:p>
@@ -1410,7 +1415,7 @@
           <a:p>
             <a:fld id="{F7F0ACB4-F5F3-4B8C-AE22-60D0A60175C5}" type="datetimeFigureOut">
               <a:rPr lang="LID4096" smtClean="0"/>
-              <a:t>03/25/2025</a:t>
+              <a:t>04/08/2026</a:t>
             </a:fld>
             <a:endParaRPr lang="LID4096"/>
           </a:p>
@@ -1825,7 +1830,7 @@
           <a:p>
             <a:fld id="{F7F0ACB4-F5F3-4B8C-AE22-60D0A60175C5}" type="datetimeFigureOut">
               <a:rPr lang="LID4096" smtClean="0"/>
-              <a:t>03/25/2025</a:t>
+              <a:t>04/08/2026</a:t>
             </a:fld>
             <a:endParaRPr lang="LID4096"/>
           </a:p>
@@ -1967,7 +1972,7 @@
           <a:p>
             <a:fld id="{F7F0ACB4-F5F3-4B8C-AE22-60D0A60175C5}" type="datetimeFigureOut">
               <a:rPr lang="LID4096" smtClean="0"/>
-              <a:t>03/25/2025</a:t>
+              <a:t>04/08/2026</a:t>
             </a:fld>
             <a:endParaRPr lang="LID4096"/>
           </a:p>
@@ -2080,7 +2085,7 @@
           <a:p>
             <a:fld id="{F7F0ACB4-F5F3-4B8C-AE22-60D0A60175C5}" type="datetimeFigureOut">
               <a:rPr lang="LID4096" smtClean="0"/>
-              <a:t>03/25/2025</a:t>
+              <a:t>04/08/2026</a:t>
             </a:fld>
             <a:endParaRPr lang="LID4096"/>
           </a:p>
@@ -2393,7 +2398,7 @@
           <a:p>
             <a:fld id="{F7F0ACB4-F5F3-4B8C-AE22-60D0A60175C5}" type="datetimeFigureOut">
               <a:rPr lang="LID4096" smtClean="0"/>
-              <a:t>03/25/2025</a:t>
+              <a:t>04/08/2026</a:t>
             </a:fld>
             <a:endParaRPr lang="LID4096"/>
           </a:p>
@@ -2682,7 +2687,7 @@
           <a:p>
             <a:fld id="{F7F0ACB4-F5F3-4B8C-AE22-60D0A60175C5}" type="datetimeFigureOut">
               <a:rPr lang="LID4096" smtClean="0"/>
-              <a:t>03/25/2025</a:t>
+              <a:t>04/08/2026</a:t>
             </a:fld>
             <a:endParaRPr lang="LID4096"/>
           </a:p>
@@ -2925,7 +2930,7 @@
           <a:p>
             <a:fld id="{F7F0ACB4-F5F3-4B8C-AE22-60D0A60175C5}" type="datetimeFigureOut">
               <a:rPr lang="LID4096" smtClean="0"/>
-              <a:t>03/25/2025</a:t>
+              <a:t>04/08/2026</a:t>
             </a:fld>
             <a:endParaRPr lang="LID4096"/>
           </a:p>
@@ -3382,7 +3387,7 @@
         </p:blipFill>
         <p:spPr>
           <a:xfrm>
-            <a:off x="3029366" y="1997241"/>
+            <a:off x="3041640" y="2021789"/>
             <a:ext cx="1515087" cy="609846"/>
           </a:xfrm>
           <a:prstGeom prst="rect">

--- a/legacy-itf-prp_038_24li-assets/images/figure.pptx
+++ b/legacy-itf-prp_038_24li-assets/images/figure.pptx
@@ -104,11 +104,6 @@
       </a:defRPr>
     </a:lvl9pPr>
   </p:defaultTextStyle>
-  <p:extLst>
-    <p:ext uri="{EFAFB233-063F-42B5-8137-9DF3F51BA10A}">
-      <p15:sldGuideLst xmlns:p15="http://schemas.microsoft.com/office/powerpoint/2012/main"/>
-    </p:ext>
-  </p:extLst>
 </p:presentation>
 </file>
 
@@ -261,7 +256,7 @@
           <a:p>
             <a:fld id="{F7F0ACB4-F5F3-4B8C-AE22-60D0A60175C5}" type="datetimeFigureOut">
               <a:rPr lang="LID4096" smtClean="0"/>
-              <a:t>04/08/2026</a:t>
+              <a:t>03/25/2025</a:t>
             </a:fld>
             <a:endParaRPr lang="LID4096"/>
           </a:p>
@@ -461,7 +456,7 @@
           <a:p>
             <a:fld id="{F7F0ACB4-F5F3-4B8C-AE22-60D0A60175C5}" type="datetimeFigureOut">
               <a:rPr lang="LID4096" smtClean="0"/>
-              <a:t>04/08/2026</a:t>
+              <a:t>03/25/2025</a:t>
             </a:fld>
             <a:endParaRPr lang="LID4096"/>
           </a:p>
@@ -671,7 +666,7 @@
           <a:p>
             <a:fld id="{F7F0ACB4-F5F3-4B8C-AE22-60D0A60175C5}" type="datetimeFigureOut">
               <a:rPr lang="LID4096" smtClean="0"/>
-              <a:t>04/08/2026</a:t>
+              <a:t>03/25/2025</a:t>
             </a:fld>
             <a:endParaRPr lang="LID4096"/>
           </a:p>
@@ -871,7 +866,7 @@
           <a:p>
             <a:fld id="{F7F0ACB4-F5F3-4B8C-AE22-60D0A60175C5}" type="datetimeFigureOut">
               <a:rPr lang="LID4096" smtClean="0"/>
-              <a:t>04/08/2026</a:t>
+              <a:t>03/25/2025</a:t>
             </a:fld>
             <a:endParaRPr lang="LID4096"/>
           </a:p>
@@ -1147,7 +1142,7 @@
           <a:p>
             <a:fld id="{F7F0ACB4-F5F3-4B8C-AE22-60D0A60175C5}" type="datetimeFigureOut">
               <a:rPr lang="LID4096" smtClean="0"/>
-              <a:t>04/08/2026</a:t>
+              <a:t>03/25/2025</a:t>
             </a:fld>
             <a:endParaRPr lang="LID4096"/>
           </a:p>
@@ -1415,7 +1410,7 @@
           <a:p>
             <a:fld id="{F7F0ACB4-F5F3-4B8C-AE22-60D0A60175C5}" type="datetimeFigureOut">
               <a:rPr lang="LID4096" smtClean="0"/>
-              <a:t>04/08/2026</a:t>
+              <a:t>03/25/2025</a:t>
             </a:fld>
             <a:endParaRPr lang="LID4096"/>
           </a:p>
@@ -1830,7 +1825,7 @@
           <a:p>
             <a:fld id="{F7F0ACB4-F5F3-4B8C-AE22-60D0A60175C5}" type="datetimeFigureOut">
               <a:rPr lang="LID4096" smtClean="0"/>
-              <a:t>04/08/2026</a:t>
+              <a:t>03/25/2025</a:t>
             </a:fld>
             <a:endParaRPr lang="LID4096"/>
           </a:p>
@@ -1972,7 +1967,7 @@
           <a:p>
             <a:fld id="{F7F0ACB4-F5F3-4B8C-AE22-60D0A60175C5}" type="datetimeFigureOut">
               <a:rPr lang="LID4096" smtClean="0"/>
-              <a:t>04/08/2026</a:t>
+              <a:t>03/25/2025</a:t>
             </a:fld>
             <a:endParaRPr lang="LID4096"/>
           </a:p>
@@ -2085,7 +2080,7 @@
           <a:p>
             <a:fld id="{F7F0ACB4-F5F3-4B8C-AE22-60D0A60175C5}" type="datetimeFigureOut">
               <a:rPr lang="LID4096" smtClean="0"/>
-              <a:t>04/08/2026</a:t>
+              <a:t>03/25/2025</a:t>
             </a:fld>
             <a:endParaRPr lang="LID4096"/>
           </a:p>
@@ -2398,7 +2393,7 @@
           <a:p>
             <a:fld id="{F7F0ACB4-F5F3-4B8C-AE22-60D0A60175C5}" type="datetimeFigureOut">
               <a:rPr lang="LID4096" smtClean="0"/>
-              <a:t>04/08/2026</a:t>
+              <a:t>03/25/2025</a:t>
             </a:fld>
             <a:endParaRPr lang="LID4096"/>
           </a:p>
@@ -2687,7 +2682,7 @@
           <a:p>
             <a:fld id="{F7F0ACB4-F5F3-4B8C-AE22-60D0A60175C5}" type="datetimeFigureOut">
               <a:rPr lang="LID4096" smtClean="0"/>
-              <a:t>04/08/2026</a:t>
+              <a:t>03/25/2025</a:t>
             </a:fld>
             <a:endParaRPr lang="LID4096"/>
           </a:p>
@@ -2930,7 +2925,7 @@
           <a:p>
             <a:fld id="{F7F0ACB4-F5F3-4B8C-AE22-60D0A60175C5}" type="datetimeFigureOut">
               <a:rPr lang="LID4096" smtClean="0"/>
-              <a:t>04/08/2026</a:t>
+              <a:t>03/25/2025</a:t>
             </a:fld>
             <a:endParaRPr lang="LID4096"/>
           </a:p>
@@ -3387,7 +3382,7 @@
         </p:blipFill>
         <p:spPr>
           <a:xfrm>
-            <a:off x="3041640" y="2021789"/>
+            <a:off x="3029366" y="1997241"/>
             <a:ext cx="1515087" cy="609846"/>
           </a:xfrm>
           <a:prstGeom prst="rect">
